--- a/ИТОГОВОЕ/Шумов В защита УП11.pptx
+++ b/ИТОГОВОЕ/Шумов В защита УП11.pptx
@@ -7583,8 +7583,8 @@
         </p:nvSpPr>
         <p:spPr>
           <a:xfrm>
-            <a:off x="1786255" y="1903730"/>
-            <a:ext cx="8618855" cy="2145030"/>
+            <a:off x="1786255" y="1554480"/>
+            <a:ext cx="8618855" cy="3175000"/>
           </a:xfrm>
           <a:prstGeom prst="rect">
             <a:avLst/>
@@ -7614,29 +7614,408 @@
             </a:lvl1pPr>
           </a:lstStyle>
           <a:p>
-            <a:pPr algn="ctr">
+            <a:pPr marL="0" indent="0" algn="ctr">
               <a:lnSpc>
                 <a:spcPct val="150000"/>
               </a:lnSpc>
+              <a:buNone/>
             </a:pPr>
             <a:r>
-              <a:rPr lang="ru-RU" sz="2800" dirty="0" smtClean="0">
-                <a:solidFill>
-                  <a:schemeClr val="bg1"/>
-                </a:solidFill>
-                <a:effectLst>
-                  <a:outerShdw blurRad="38100" dist="38100" dir="2700000" algn="tl">
-                    <a:srgbClr val="000000">
-                      <a:alpha val="43137"/>
-                    </a:srgbClr>
-                  </a:outerShdw>
-                </a:effectLst>
-                <a:latin typeface="+mn-lt"/>
-                <a:cs typeface="+mn-lt"/>
-              </a:rPr>
-              <a:t>Разработана автоматизированная информационная система тестирования, которая обеспечивает минимизацию ошибок при проверке ответов, повышение качества обучения и прозрачность учебного процесса, все цели выполнены.</a:t>
-            </a:r>
-            <a:endParaRPr lang="ru-RU" sz="2800" dirty="0" smtClean="0">
+              <a:rPr lang="ru-RU" altLang="ru-RU" sz="2800" b="1" dirty="0" smtClean="0">
+                <a:solidFill>
+                  <a:schemeClr val="bg1"/>
+                </a:solidFill>
+                <a:effectLst>
+                  <a:outerShdw blurRad="38100" dist="38100" dir="2700000" algn="tl">
+                    <a:srgbClr val="000000">
+                      <a:alpha val="43137"/>
+                    </a:srgbClr>
+                  </a:outerShdw>
+                </a:effectLst>
+                <a:latin typeface="Calibri" panose="020F0502020204030204" charset="0"/>
+                <a:cs typeface="Calibri" panose="020F0502020204030204" charset="0"/>
+              </a:rPr>
+              <a:t>Спроектирована база данных для автоматизированной системы тестирования, которая обеспечивает м</a:t>
+            </a:r>
+            <a:r>
+              <a:rPr lang="en-US" altLang="en-US" sz="2800" b="1" dirty="0">
+                <a:solidFill>
+                  <a:schemeClr val="bg1"/>
+                </a:solidFill>
+                <a:effectLst>
+                  <a:outerShdw blurRad="38100" dist="38100" dir="2700000" algn="tl">
+                    <a:srgbClr val="000000">
+                      <a:alpha val="43137"/>
+                    </a:srgbClr>
+                  </a:outerShdw>
+                </a:effectLst>
+                <a:latin typeface="Calibri" panose="020F0502020204030204" charset="0"/>
+                <a:cs typeface="Calibri" panose="020F0502020204030204" charset="0"/>
+                <a:sym typeface="+mn-ea"/>
+              </a:rPr>
+              <a:t>инимизацию</a:t>
+            </a:r>
+            <a:r>
+              <a:rPr lang="en-US" altLang="ru-RU" sz="2800" b="1" dirty="0">
+                <a:solidFill>
+                  <a:schemeClr val="bg1"/>
+                </a:solidFill>
+                <a:effectLst>
+                  <a:outerShdw blurRad="38100" dist="38100" dir="2700000" algn="tl">
+                    <a:srgbClr val="000000">
+                      <a:alpha val="43137"/>
+                    </a:srgbClr>
+                  </a:outerShdw>
+                </a:effectLst>
+                <a:latin typeface="Calibri" panose="020F0502020204030204" charset="0"/>
+                <a:cs typeface="Calibri" panose="020F0502020204030204" charset="0"/>
+                <a:sym typeface="+mn-ea"/>
+              </a:rPr>
+              <a:t> </a:t>
+            </a:r>
+            <a:r>
+              <a:rPr lang="en-US" altLang="en-US" sz="2800" b="1" dirty="0">
+                <a:solidFill>
+                  <a:schemeClr val="bg1"/>
+                </a:solidFill>
+                <a:effectLst>
+                  <a:outerShdw blurRad="38100" dist="38100" dir="2700000" algn="tl">
+                    <a:srgbClr val="000000">
+                      <a:alpha val="43137"/>
+                    </a:srgbClr>
+                  </a:outerShdw>
+                </a:effectLst>
+                <a:latin typeface="Calibri" panose="020F0502020204030204" charset="0"/>
+                <a:cs typeface="Calibri" panose="020F0502020204030204" charset="0"/>
+                <a:sym typeface="+mn-ea"/>
+              </a:rPr>
+              <a:t>ошибок</a:t>
+            </a:r>
+            <a:r>
+              <a:rPr lang="en-US" altLang="ru-RU" sz="2800" b="1" dirty="0">
+                <a:solidFill>
+                  <a:schemeClr val="bg1"/>
+                </a:solidFill>
+                <a:effectLst>
+                  <a:outerShdw blurRad="38100" dist="38100" dir="2700000" algn="tl">
+                    <a:srgbClr val="000000">
+                      <a:alpha val="43137"/>
+                    </a:srgbClr>
+                  </a:outerShdw>
+                </a:effectLst>
+                <a:latin typeface="Calibri" panose="020F0502020204030204" charset="0"/>
+                <a:cs typeface="Calibri" panose="020F0502020204030204" charset="0"/>
+                <a:sym typeface="+mn-ea"/>
+              </a:rPr>
+              <a:t> </a:t>
+            </a:r>
+            <a:r>
+              <a:rPr lang="en-US" altLang="en-US" sz="2800" b="1" dirty="0">
+                <a:solidFill>
+                  <a:schemeClr val="bg1"/>
+                </a:solidFill>
+                <a:effectLst>
+                  <a:outerShdw blurRad="38100" dist="38100" dir="2700000" algn="tl">
+                    <a:srgbClr val="000000">
+                      <a:alpha val="43137"/>
+                    </a:srgbClr>
+                  </a:outerShdw>
+                </a:effectLst>
+                <a:latin typeface="Calibri" panose="020F0502020204030204" charset="0"/>
+                <a:cs typeface="Calibri" panose="020F0502020204030204" charset="0"/>
+                <a:sym typeface="+mn-ea"/>
+              </a:rPr>
+              <a:t>при</a:t>
+            </a:r>
+            <a:r>
+              <a:rPr lang="en-US" altLang="ru-RU" sz="2800" b="1" dirty="0">
+                <a:solidFill>
+                  <a:schemeClr val="bg1"/>
+                </a:solidFill>
+                <a:effectLst>
+                  <a:outerShdw blurRad="38100" dist="38100" dir="2700000" algn="tl">
+                    <a:srgbClr val="000000">
+                      <a:alpha val="43137"/>
+                    </a:srgbClr>
+                  </a:outerShdw>
+                </a:effectLst>
+                <a:latin typeface="Calibri" panose="020F0502020204030204" charset="0"/>
+                <a:cs typeface="Calibri" panose="020F0502020204030204" charset="0"/>
+                <a:sym typeface="+mn-ea"/>
+              </a:rPr>
+              <a:t> </a:t>
+            </a:r>
+            <a:r>
+              <a:rPr lang="en-US" altLang="en-US" sz="2800" b="1" dirty="0">
+                <a:solidFill>
+                  <a:schemeClr val="bg1"/>
+                </a:solidFill>
+                <a:effectLst>
+                  <a:outerShdw blurRad="38100" dist="38100" dir="2700000" algn="tl">
+                    <a:srgbClr val="000000">
+                      <a:alpha val="43137"/>
+                    </a:srgbClr>
+                  </a:outerShdw>
+                </a:effectLst>
+                <a:latin typeface="Calibri" panose="020F0502020204030204" charset="0"/>
+                <a:cs typeface="Calibri" panose="020F0502020204030204" charset="0"/>
+                <a:sym typeface="+mn-ea"/>
+              </a:rPr>
+              <a:t>проверке</a:t>
+            </a:r>
+            <a:r>
+              <a:rPr lang="en-US" altLang="ru-RU" sz="2800" b="1" dirty="0">
+                <a:solidFill>
+                  <a:schemeClr val="bg1"/>
+                </a:solidFill>
+                <a:effectLst>
+                  <a:outerShdw blurRad="38100" dist="38100" dir="2700000" algn="tl">
+                    <a:srgbClr val="000000">
+                      <a:alpha val="43137"/>
+                    </a:srgbClr>
+                  </a:outerShdw>
+                </a:effectLst>
+                <a:latin typeface="Calibri" panose="020F0502020204030204" charset="0"/>
+                <a:cs typeface="Calibri" panose="020F0502020204030204" charset="0"/>
+                <a:sym typeface="+mn-ea"/>
+              </a:rPr>
+              <a:t> </a:t>
+            </a:r>
+            <a:r>
+              <a:rPr lang="en-US" altLang="en-US" sz="2800" b="1" dirty="0">
+                <a:solidFill>
+                  <a:schemeClr val="bg1"/>
+                </a:solidFill>
+                <a:effectLst>
+                  <a:outerShdw blurRad="38100" dist="38100" dir="2700000" algn="tl">
+                    <a:srgbClr val="000000">
+                      <a:alpha val="43137"/>
+                    </a:srgbClr>
+                  </a:outerShdw>
+                </a:effectLst>
+                <a:latin typeface="Calibri" panose="020F0502020204030204" charset="0"/>
+                <a:cs typeface="Calibri" panose="020F0502020204030204" charset="0"/>
+                <a:sym typeface="+mn-ea"/>
+              </a:rPr>
+              <a:t>ответов</a:t>
+            </a:r>
+            <a:r>
+              <a:rPr lang="ru-RU" altLang="en-US" sz="2800" b="1" dirty="0">
+                <a:solidFill>
+                  <a:schemeClr val="bg1"/>
+                </a:solidFill>
+                <a:effectLst>
+                  <a:outerShdw blurRad="38100" dist="38100" dir="2700000" algn="tl">
+                    <a:srgbClr val="000000">
+                      <a:alpha val="43137"/>
+                    </a:srgbClr>
+                  </a:outerShdw>
+                </a:effectLst>
+                <a:latin typeface="Calibri" panose="020F0502020204030204" charset="0"/>
+                <a:cs typeface="Calibri" panose="020F0502020204030204" charset="0"/>
+                <a:sym typeface="+mn-ea"/>
+              </a:rPr>
+              <a:t>, п</a:t>
+            </a:r>
+            <a:r>
+              <a:rPr lang="en-US" altLang="en-US" sz="2800" b="1" dirty="0">
+                <a:solidFill>
+                  <a:schemeClr val="bg1"/>
+                </a:solidFill>
+                <a:effectLst>
+                  <a:outerShdw blurRad="38100" dist="38100" dir="2700000" algn="tl">
+                    <a:srgbClr val="000000">
+                      <a:alpha val="43137"/>
+                    </a:srgbClr>
+                  </a:outerShdw>
+                </a:effectLst>
+                <a:latin typeface="Calibri" panose="020F0502020204030204" charset="0"/>
+                <a:cs typeface="Calibri" panose="020F0502020204030204" charset="0"/>
+                <a:sym typeface="+mn-ea"/>
+              </a:rPr>
+              <a:t>овышение</a:t>
+            </a:r>
+            <a:r>
+              <a:rPr lang="en-US" altLang="ru-RU" sz="2800" b="1" dirty="0">
+                <a:solidFill>
+                  <a:schemeClr val="bg1"/>
+                </a:solidFill>
+                <a:effectLst>
+                  <a:outerShdw blurRad="38100" dist="38100" dir="2700000" algn="tl">
+                    <a:srgbClr val="000000">
+                      <a:alpha val="43137"/>
+                    </a:srgbClr>
+                  </a:outerShdw>
+                </a:effectLst>
+                <a:latin typeface="Calibri" panose="020F0502020204030204" charset="0"/>
+                <a:cs typeface="Calibri" panose="020F0502020204030204" charset="0"/>
+                <a:sym typeface="+mn-ea"/>
+              </a:rPr>
+              <a:t> </a:t>
+            </a:r>
+            <a:r>
+              <a:rPr lang="en-US" altLang="en-US" sz="2800" b="1" dirty="0">
+                <a:solidFill>
+                  <a:schemeClr val="bg1"/>
+                </a:solidFill>
+                <a:effectLst>
+                  <a:outerShdw blurRad="38100" dist="38100" dir="2700000" algn="tl">
+                    <a:srgbClr val="000000">
+                      <a:alpha val="43137"/>
+                    </a:srgbClr>
+                  </a:outerShdw>
+                </a:effectLst>
+                <a:latin typeface="Calibri" panose="020F0502020204030204" charset="0"/>
+                <a:cs typeface="Calibri" panose="020F0502020204030204" charset="0"/>
+                <a:sym typeface="+mn-ea"/>
+              </a:rPr>
+              <a:t>качества</a:t>
+            </a:r>
+            <a:r>
+              <a:rPr lang="en-US" altLang="ru-RU" sz="2800" b="1" dirty="0">
+                <a:solidFill>
+                  <a:schemeClr val="bg1"/>
+                </a:solidFill>
+                <a:effectLst>
+                  <a:outerShdw blurRad="38100" dist="38100" dir="2700000" algn="tl">
+                    <a:srgbClr val="000000">
+                      <a:alpha val="43137"/>
+                    </a:srgbClr>
+                  </a:outerShdw>
+                </a:effectLst>
+                <a:latin typeface="Calibri" panose="020F0502020204030204" charset="0"/>
+                <a:cs typeface="Calibri" panose="020F0502020204030204" charset="0"/>
+                <a:sym typeface="+mn-ea"/>
+              </a:rPr>
+              <a:t> </a:t>
+            </a:r>
+            <a:r>
+              <a:rPr lang="en-US" altLang="en-US" sz="2800" b="1" dirty="0">
+                <a:solidFill>
+                  <a:schemeClr val="bg1"/>
+                </a:solidFill>
+                <a:effectLst>
+                  <a:outerShdw blurRad="38100" dist="38100" dir="2700000" algn="tl">
+                    <a:srgbClr val="000000">
+                      <a:alpha val="43137"/>
+                    </a:srgbClr>
+                  </a:outerShdw>
+                </a:effectLst>
+                <a:latin typeface="Calibri" panose="020F0502020204030204" charset="0"/>
+                <a:cs typeface="Calibri" panose="020F0502020204030204" charset="0"/>
+                <a:sym typeface="+mn-ea"/>
+              </a:rPr>
+              <a:t>обучения</a:t>
+            </a:r>
+            <a:r>
+              <a:rPr lang="ru-RU" altLang="en-US" sz="2800" b="1" dirty="0">
+                <a:solidFill>
+                  <a:schemeClr val="bg1"/>
+                </a:solidFill>
+                <a:effectLst>
+                  <a:outerShdw blurRad="38100" dist="38100" dir="2700000" algn="tl">
+                    <a:srgbClr val="000000">
+                      <a:alpha val="43137"/>
+                    </a:srgbClr>
+                  </a:outerShdw>
+                </a:effectLst>
+                <a:latin typeface="Calibri" panose="020F0502020204030204" charset="0"/>
+                <a:cs typeface="Calibri" panose="020F0502020204030204" charset="0"/>
+                <a:sym typeface="+mn-ea"/>
+              </a:rPr>
+              <a:t>, п</a:t>
+            </a:r>
+            <a:r>
+              <a:rPr lang="en-US" altLang="en-US" sz="2800" b="1" dirty="0">
+                <a:solidFill>
+                  <a:schemeClr val="bg1"/>
+                </a:solidFill>
+                <a:effectLst>
+                  <a:outerShdw blurRad="38100" dist="38100" dir="2700000" algn="tl">
+                    <a:srgbClr val="000000">
+                      <a:alpha val="43137"/>
+                    </a:srgbClr>
+                  </a:outerShdw>
+                </a:effectLst>
+                <a:latin typeface="Calibri" panose="020F0502020204030204" charset="0"/>
+                <a:cs typeface="Calibri" panose="020F0502020204030204" charset="0"/>
+                <a:sym typeface="+mn-ea"/>
+              </a:rPr>
+              <a:t>розрачность</a:t>
+            </a:r>
+            <a:r>
+              <a:rPr lang="en-US" altLang="ru-RU" sz="2800" b="1" dirty="0">
+                <a:solidFill>
+                  <a:schemeClr val="bg1"/>
+                </a:solidFill>
+                <a:effectLst>
+                  <a:outerShdw blurRad="38100" dist="38100" dir="2700000" algn="tl">
+                    <a:srgbClr val="000000">
+                      <a:alpha val="43137"/>
+                    </a:srgbClr>
+                  </a:outerShdw>
+                </a:effectLst>
+                <a:latin typeface="Calibri" panose="020F0502020204030204" charset="0"/>
+                <a:cs typeface="Calibri" panose="020F0502020204030204" charset="0"/>
+                <a:sym typeface="+mn-ea"/>
+              </a:rPr>
+              <a:t> </a:t>
+            </a:r>
+            <a:r>
+              <a:rPr lang="en-US" altLang="en-US" sz="2800" b="1" dirty="0">
+                <a:solidFill>
+                  <a:schemeClr val="bg1"/>
+                </a:solidFill>
+                <a:effectLst>
+                  <a:outerShdw blurRad="38100" dist="38100" dir="2700000" algn="tl">
+                    <a:srgbClr val="000000">
+                      <a:alpha val="43137"/>
+                    </a:srgbClr>
+                  </a:outerShdw>
+                </a:effectLst>
+                <a:latin typeface="Calibri" panose="020F0502020204030204" charset="0"/>
+                <a:cs typeface="Calibri" panose="020F0502020204030204" charset="0"/>
+                <a:sym typeface="+mn-ea"/>
+              </a:rPr>
+              <a:t>учебного</a:t>
+            </a:r>
+            <a:r>
+              <a:rPr lang="en-US" altLang="ru-RU" sz="2800" b="1" dirty="0">
+                <a:solidFill>
+                  <a:schemeClr val="bg1"/>
+                </a:solidFill>
+                <a:effectLst>
+                  <a:outerShdw blurRad="38100" dist="38100" dir="2700000" algn="tl">
+                    <a:srgbClr val="000000">
+                      <a:alpha val="43137"/>
+                    </a:srgbClr>
+                  </a:outerShdw>
+                </a:effectLst>
+                <a:latin typeface="Calibri" panose="020F0502020204030204" charset="0"/>
+                <a:cs typeface="Calibri" panose="020F0502020204030204" charset="0"/>
+                <a:sym typeface="+mn-ea"/>
+              </a:rPr>
+              <a:t> </a:t>
+            </a:r>
+            <a:r>
+              <a:rPr lang="en-US" altLang="en-US" sz="2800" b="1" dirty="0">
+                <a:solidFill>
+                  <a:schemeClr val="bg1"/>
+                </a:solidFill>
+                <a:effectLst>
+                  <a:outerShdw blurRad="38100" dist="38100" dir="2700000" algn="tl">
+                    <a:srgbClr val="000000">
+                      <a:alpha val="43137"/>
+                    </a:srgbClr>
+                  </a:outerShdw>
+                </a:effectLst>
+                <a:latin typeface="Calibri" panose="020F0502020204030204" charset="0"/>
+                <a:cs typeface="Calibri" panose="020F0502020204030204" charset="0"/>
+                <a:sym typeface="+mn-ea"/>
+              </a:rPr>
+              <a:t>процесса</a:t>
+            </a:r>
+            <a:endParaRPr lang="ru-RU" altLang="ru-RU" sz="2800" b="1" dirty="0" smtClean="0">
               <a:solidFill>
                 <a:schemeClr val="bg1"/>
               </a:solidFill>
@@ -7647,8 +8026,8 @@
                   </a:srgbClr>
                 </a:outerShdw>
               </a:effectLst>
-              <a:latin typeface="+mn-lt"/>
-              <a:cs typeface="+mn-lt"/>
+              <a:latin typeface="Calibri" panose="020F0502020204030204" charset="0"/>
+              <a:cs typeface="Calibri" panose="020F0502020204030204" charset="0"/>
             </a:endParaRPr>
           </a:p>
         </p:txBody>
@@ -8001,7 +8380,7 @@
       <p:sp>
         <p:nvSpPr>
           <p:cNvPr id="4" name="Текстовое поле 3">
-            <a:hlinkClick r:id="rId1" tooltip="" action="ppaction://hlinksldjump"/>
+            <a:hlinkClick r:id="rId1" action="ppaction://hlinksldjump"/>
           </p:cNvPr>
           <p:cNvSpPr txBox="1"/>
           <p:nvPr/>
@@ -8054,7 +8433,7 @@
       <p:sp>
         <p:nvSpPr>
           <p:cNvPr id="5" name="Текстовое поле 4">
-            <a:hlinkClick r:id="rId2" tooltip="" action="ppaction://hlinksldjump"/>
+            <a:hlinkClick r:id="rId2" action="ppaction://hlinksldjump"/>
           </p:cNvPr>
           <p:cNvSpPr txBox="1"/>
           <p:nvPr/>
@@ -8107,7 +8486,7 @@
       <p:sp>
         <p:nvSpPr>
           <p:cNvPr id="6" name="Текстовое поле 5">
-            <a:hlinkClick r:id="rId3" tooltip="" action="ppaction://hlinksldjump"/>
+            <a:hlinkClick r:id="rId3" action="ppaction://hlinksldjump"/>
           </p:cNvPr>
           <p:cNvSpPr txBox="1"/>
           <p:nvPr/>
@@ -8175,7 +8554,7 @@
       <p:sp>
         <p:nvSpPr>
           <p:cNvPr id="9" name="Текстовое поле 8">
-            <a:hlinkClick r:id="rId4" tooltip="" action="ppaction://hlinksldjump"/>
+            <a:hlinkClick r:id="rId4" action="ppaction://hlinksldjump"/>
           </p:cNvPr>
           <p:cNvSpPr txBox="1"/>
           <p:nvPr/>
@@ -8258,7 +8637,7 @@
       <p:sp>
         <p:nvSpPr>
           <p:cNvPr id="10" name="Текстовое поле 9">
-            <a:hlinkClick r:id="rId5" tooltip="" action="ppaction://hlinksldjump"/>
+            <a:hlinkClick r:id="rId5" action="ppaction://hlinksldjump"/>
           </p:cNvPr>
           <p:cNvSpPr txBox="1"/>
           <p:nvPr/>
@@ -8311,7 +8690,7 @@
       <p:sp>
         <p:nvSpPr>
           <p:cNvPr id="11" name="Текстовое поле 10">
-            <a:hlinkClick r:id="rId6" tooltip="" action="ppaction://hlinksldjump"/>
+            <a:hlinkClick r:id="rId6" action="ppaction://hlinksldjump"/>
           </p:cNvPr>
           <p:cNvSpPr txBox="1"/>
           <p:nvPr/>
@@ -8364,7 +8743,7 @@
       <p:sp>
         <p:nvSpPr>
           <p:cNvPr id="12" name="Текстовое поле 11">
-            <a:hlinkClick r:id="rId7" tooltip="" action="ppaction://hlinksldjump"/>
+            <a:hlinkClick r:id="rId7" action="ppaction://hlinksldjump"/>
           </p:cNvPr>
           <p:cNvSpPr txBox="1"/>
           <p:nvPr/>
@@ -8417,7 +8796,7 @@
       <p:sp>
         <p:nvSpPr>
           <p:cNvPr id="13" name="Текстовое поле 12">
-            <a:hlinkClick r:id="rId8" tooltip="" action="ppaction://hlinksldjump"/>
+            <a:hlinkClick r:id="rId8" action="ppaction://hlinksldjump"/>
           </p:cNvPr>
           <p:cNvSpPr txBox="1"/>
           <p:nvPr/>
@@ -8470,7 +8849,7 @@
       <p:sp>
         <p:nvSpPr>
           <p:cNvPr id="14" name="Текстовое поле 13">
-            <a:hlinkClick r:id="rId9" tooltip="" action="ppaction://hlinksldjump"/>
+            <a:hlinkClick r:id="rId9" action="ppaction://hlinksldjump"/>
           </p:cNvPr>
           <p:cNvSpPr txBox="1"/>
           <p:nvPr/>
@@ -8523,7 +8902,7 @@
       <p:sp>
         <p:nvSpPr>
           <p:cNvPr id="15" name="Текстовое поле 14">
-            <a:hlinkClick r:id="rId10" tooltip="" action="ppaction://hlinksldjump"/>
+            <a:hlinkClick r:id="rId10" action="ppaction://hlinksldjump"/>
           </p:cNvPr>
           <p:cNvSpPr txBox="1"/>
           <p:nvPr/>
@@ -8576,7 +8955,7 @@
       <p:sp>
         <p:nvSpPr>
           <p:cNvPr id="16" name="Текстовое поле 15">
-            <a:hlinkClick r:id="rId11" tooltip="" action="ppaction://hlinksldjump"/>
+            <a:hlinkClick r:id="rId11" action="ppaction://hlinksldjump"/>
           </p:cNvPr>
           <p:cNvSpPr txBox="1"/>
           <p:nvPr/>
@@ -8629,7 +9008,7 @@
       <p:sp>
         <p:nvSpPr>
           <p:cNvPr id="17" name="Текстовое поле 16">
-            <a:hlinkClick r:id="rId12" tooltip="" action="ppaction://hlinksldjump"/>
+            <a:hlinkClick r:id="rId12" action="ppaction://hlinksldjump"/>
           </p:cNvPr>
           <p:cNvSpPr txBox="1"/>
           <p:nvPr/>
@@ -8682,7 +9061,7 @@
       <p:sp>
         <p:nvSpPr>
           <p:cNvPr id="18" name="Текстовое поле 17">
-            <a:hlinkClick r:id="rId13" tooltip="" action="ppaction://hlinksldjump"/>
+            <a:hlinkClick r:id="rId13" action="ppaction://hlinksldjump"/>
           </p:cNvPr>
           <p:cNvSpPr txBox="1"/>
           <p:nvPr/>
@@ -8735,7 +9114,7 @@
       <p:sp>
         <p:nvSpPr>
           <p:cNvPr id="19" name="Текстовое поле 18">
-            <a:hlinkClick r:id="rId14" tooltip="" action="ppaction://hlinksldjump"/>
+            <a:hlinkClick r:id="rId14" action="ppaction://hlinksldjump"/>
           </p:cNvPr>
           <p:cNvSpPr txBox="1"/>
           <p:nvPr/>
@@ -8788,7 +9167,7 @@
       <p:sp>
         <p:nvSpPr>
           <p:cNvPr id="20" name="Текстовое поле 19">
-            <a:hlinkClick r:id="rId15" tooltip="" action="ppaction://hlinksldjump"/>
+            <a:hlinkClick r:id="rId15" action="ppaction://hlinksldjump"/>
           </p:cNvPr>
           <p:cNvSpPr txBox="1"/>
           <p:nvPr/>
@@ -9941,7 +10320,7 @@
         <p:pic>
           <p:nvPicPr>
             <p:cNvPr id="6" name="Изображение 5" descr="6351305">
-              <a:hlinkClick r:id="rId1" tooltip="" action="ppaction://hlinksldjump"/>
+              <a:hlinkClick r:id="rId1" action="ppaction://hlinksldjump"/>
             </p:cNvPr>
             <p:cNvPicPr>
               <a:picLocks noChangeAspect="1"/>
@@ -10815,30 +11194,6 @@
           </a:p>
         </p:txBody>
       </p:sp>
-      <p:pic>
-        <p:nvPicPr>
-          <p:cNvPr id="35" name="Рисунок 35"/>
-          <p:cNvPicPr>
-            <a:picLocks noChangeAspect="1"/>
-          </p:cNvPicPr>
-          <p:nvPr/>
-        </p:nvPicPr>
-        <p:blipFill>
-          <a:blip r:embed="rId1"/>
-          <a:stretch>
-            <a:fillRect/>
-          </a:stretch>
-        </p:blipFill>
-        <p:spPr>
-          <a:xfrm>
-            <a:off x="2191385" y="755650"/>
-            <a:ext cx="7810500" cy="6102350"/>
-          </a:xfrm>
-          <a:prstGeom prst="rect">
-            <a:avLst/>
-          </a:prstGeom>
-        </p:spPr>
-      </p:pic>
       <p:grpSp>
         <p:nvGrpSpPr>
           <p:cNvPr id="10" name="Группа 9"/>
@@ -10901,7 +11256,7 @@
         <p:pic>
           <p:nvPicPr>
             <p:cNvPr id="6" name="Изображение 5" descr="6351305">
-              <a:hlinkClick r:id="rId2" action="ppaction://hlinksldjump"/>
+              <a:hlinkClick r:id="rId1" action="ppaction://hlinksldjump"/>
             </p:cNvPr>
             <p:cNvPicPr>
               <a:picLocks noChangeAspect="1"/>
@@ -10909,7 +11264,7 @@
             <p:nvPr/>
           </p:nvPicPr>
           <p:blipFill>
-            <a:blip r:embed="rId3"/>
+            <a:blip r:embed="rId2"/>
             <a:stretch>
               <a:fillRect/>
             </a:stretch>
@@ -10925,6 +11280,30 @@
           </p:spPr>
         </p:pic>
       </p:grpSp>
+      <p:pic>
+        <p:nvPicPr>
+          <p:cNvPr id="3" name="Изображение 2"/>
+          <p:cNvPicPr>
+            <a:picLocks noChangeAspect="1"/>
+          </p:cNvPicPr>
+          <p:nvPr/>
+        </p:nvPicPr>
+        <p:blipFill>
+          <a:blip r:embed="rId3"/>
+          <a:stretch>
+            <a:fillRect/>
+          </a:stretch>
+        </p:blipFill>
+        <p:spPr>
+          <a:xfrm>
+            <a:off x="3072765" y="894715"/>
+            <a:ext cx="6047105" cy="5849620"/>
+          </a:xfrm>
+          <a:prstGeom prst="rect">
+            <a:avLst/>
+          </a:prstGeom>
+        </p:spPr>
+      </p:pic>
     </p:spTree>
   </p:cSld>
   <p:clrMapOvr>
